--- a/lessons/openrn_hp_ch4/package/20260906_NHP_Family_Dynamics_Part_1.pptx
+++ b/lessons/openrn_hp_ch4/package/20260906_NHP_Family_Dynamics_Part_1.pptx
@@ -5130,7 +5130,7 @@
                 </a:solidFill>
                 <a:latin typeface="Aptos"/>
               </a:rPr>
-              <a:t>Family Dynamics: assessing and acting on the family as part of the client</a:t>
+              <a:t>Family Dynamics at the Bedside</a:t>
             </a:r>
           </a:p>
         </p:txBody>
@@ -5762,7 +5762,7 @@
                 </a:solidFill>
                 <a:latin typeface="Aptos"/>
               </a:rPr>
-              <a:t>See the whole map: structure, dynamics, risk, strain, action</a:t>
+              <a:t>See the whole map first: five lanes</a:t>
             </a:r>
           </a:p>
         </p:txBody>
@@ -7108,7 +7108,7 @@
                 </a:solidFill>
                 <a:latin typeface="Aptos"/>
               </a:rPr>
-              <a:t>Structure matters because it predicts function, cue, and nursing response.</a:t>
+              <a:t>Compare parenting styles by responsiveness and demandingness and their outcomes.</a:t>
             </a:r>
           </a:p>
         </p:txBody>
@@ -9796,7 +9796,7 @@
                 </a:solidFill>
                 <a:latin typeface="Aptos"/>
               </a:rPr>
-              <a:t>anger, withdrawal, anxiety about the future, depression, exhaustion, sleeplessness, irritability, new health problems</a:t>
+              <a:t>anger, withdrawal, anxiety, depression, exhaustion, sleeplessness, irritability, new illness</a:t>
             </a:r>
           </a:p>
         </p:txBody>
@@ -9956,7 +9956,7 @@
                 </a:solidFill>
                 <a:latin typeface="Aptos"/>
               </a:rPr>
-              <a:t>day care, respite, residential and palliative care; Al-Anon, Nar-Anon, Sibshop; family therapy referral</a:t>
+              <a:t>day care, respite, residential or palliative care; Al-Anon, Nar-Anon, Sibshop; family therapy</a:t>
             </a:r>
           </a:p>
         </p:txBody>
@@ -10116,7 +10116,7 @@
                 </a:solidFill>
                 <a:latin typeface="Aptos"/>
               </a:rPr>
-              <a:t>provider visits, nutrition, exercise, rest; breathing, progressive muscle relaxation, visualization, meditation</a:t>
+              <a:t>provider visits, nutrition, exercise, rest; relaxation breathing, visualization, meditation</a:t>
             </a:r>
           </a:p>
         </p:txBody>
@@ -10276,7 +10276,7 @@
                 </a:solidFill>
                 <a:latin typeface="Aptos"/>
               </a:rPr>
-              <a:t>respect and dignity; collaboration; empowerment; information sharing. Better outcomes, less family stress.</a:t>
+              <a:t>respect and dignity; collaboration; empowerment; information sharing</a:t>
             </a:r>
           </a:p>
         </p:txBody>
@@ -10356,7 +10356,7 @@
                 </a:solidFill>
                 <a:latin typeface="Aptos"/>
               </a:rPr>
-              <a:t>Structure matters because it predicts function, cue, and nursing response.</a:t>
+              <a:t>Recognize caregiver stress signs and match them to resources and self-care teaching.</a:t>
             </a:r>
           </a:p>
         </p:txBody>
@@ -12013,10 +12013,10 @@
                 </a:solidFill>
                 <a:latin typeface="Aptos"/>
               </a:rPr>
-              <a:t>- Client is a minor: parent or guardian is the decision-maker, autonomy still advocated
-- Observe hygiene, affect, communication, nutrition, and how mother and child interact
-- Ask what the family knows about the illness and how they are responding
-- Ask about supports: respite, community resources, other family</a:t>
+              <a:t>- Minor: parent decides; autonomy still advocated
+- Survey hygiene, affect, communication, nutrition
+- What does the family know, and how do they respond?
+- Supports: respite, community, other family</a:t>
             </a:r>
           </a:p>
         </p:txBody>
@@ -12336,9 +12336,9 @@
                 </a:solidFill>
                 <a:latin typeface="Aptos"/>
               </a:rPr>
-              <a:t>- Ask the client privately who they want present; the nurse asks others to leave
-- General survey of client and family: hygiene, affect, communication, nutrition
-- Unfriendly, disrespectful, hostile interaction is a cue to act on</a:t>
+              <a:t>- Ask the client privately who they want present
+- General survey of client and family
+- Hostile or disrespectful interaction is a cue to act on</a:t>
             </a:r>
           </a:p>
         </p:txBody>
@@ -12779,7 +12779,7 @@
                 </a:solidFill>
                 <a:latin typeface="Aptos"/>
               </a:rPr>
-              <a:t>Order the four cues from most to least urgent nursing action.</a:t>
+              <a:t>cues to sort</a:t>
             </a:r>
           </a:p>
         </p:txBody>
@@ -12814,10 +12814,10 @@
                 </a:solidFill>
                 <a:latin typeface="Aptos"/>
               </a:rPr>
-              <a:t>- mother asks whether spanking is acceptable
-- bruises in different stages of healing with an inconsistent explanation
-- mother reports sleeplessness, irritability, and dread about the future
-- mother speaks to the child with hostility and contempt during the survey</a:t>
+              <a:t>- asks whether spanking is acceptable
+- bruises in different stages of healing, inconsistent explanation
+- sleeplessness, irritability, dread about the future
+- hostility and contempt toward the child during the survey</a:t>
             </a:r>
           </a:p>
         </p:txBody>
@@ -12825,6 +12825,169 @@
       <p:sp>
         <p:nvSpPr>
           <p:cNvPr id="12" name="Rounded Rectangle 11"/>
+          <p:cNvSpPr/>
+          <p:nvPr/>
+        </p:nvSpPr>
+        <p:spPr>
+          <a:xfrm>
+            <a:off x="6178143" y="1143000"/>
+            <a:ext cx="5510631" cy="1234440"/>
+          </a:xfrm>
+          <a:prstGeom prst="roundRect">
+            <a:avLst/>
+          </a:prstGeom>
+          <a:solidFill>
+            <a:srgbClr val="FFFFFF"/>
+          </a:solidFill>
+          <a:ln w="12700">
+            <a:solidFill>
+              <a:srgbClr val="D7DFEA"/>
+            </a:solidFill>
+          </a:ln>
+        </p:spPr>
+        <p:style>
+          <a:lnRef idx="1">
+            <a:schemeClr val="accent1"/>
+          </a:lnRef>
+          <a:fillRef idx="3">
+            <a:schemeClr val="accent1"/>
+          </a:fillRef>
+          <a:effectRef idx="2">
+            <a:schemeClr val="accent1"/>
+          </a:effectRef>
+          <a:fontRef idx="minor">
+            <a:schemeClr val="lt1"/>
+          </a:fontRef>
+        </p:style>
+        <p:txBody>
+          <a:bodyPr rtlCol="0" anchor="ctr"/>
+          <a:lstStyle/>
+          <a:p>
+            <a:pPr algn="ctr"/>
+          </a:p>
+        </p:txBody>
+      </p:sp>
+      <p:sp>
+        <p:nvSpPr>
+          <p:cNvPr id="13" name="Rectangle 12"/>
+          <p:cNvSpPr/>
+          <p:nvPr/>
+        </p:nvSpPr>
+        <p:spPr>
+          <a:xfrm>
+            <a:off x="6233007" y="1289304"/>
+            <a:ext cx="45720" cy="941832"/>
+          </a:xfrm>
+          <a:prstGeom prst="rect">
+            <a:avLst/>
+          </a:prstGeom>
+          <a:solidFill>
+            <a:srgbClr val="2563EB"/>
+          </a:solidFill>
+          <a:ln w="12700">
+            <a:solidFill>
+              <a:srgbClr val="2563EB"/>
+            </a:solidFill>
+          </a:ln>
+        </p:spPr>
+        <p:style>
+          <a:lnRef idx="1">
+            <a:schemeClr val="accent1"/>
+          </a:lnRef>
+          <a:fillRef idx="3">
+            <a:schemeClr val="accent1"/>
+          </a:fillRef>
+          <a:effectRef idx="2">
+            <a:schemeClr val="accent1"/>
+          </a:effectRef>
+          <a:fontRef idx="minor">
+            <a:schemeClr val="lt1"/>
+          </a:fontRef>
+        </p:style>
+        <p:txBody>
+          <a:bodyPr rtlCol="0" anchor="ctr"/>
+          <a:lstStyle/>
+          <a:p>
+            <a:pPr algn="ctr"/>
+          </a:p>
+        </p:txBody>
+      </p:sp>
+      <p:sp>
+        <p:nvSpPr>
+          <p:cNvPr id="14" name="TextBox 13"/>
+          <p:cNvSpPr txBox="1"/>
+          <p:nvPr/>
+        </p:nvSpPr>
+        <p:spPr>
+          <a:xfrm>
+            <a:off x="6342735" y="1252728"/>
+            <a:ext cx="5254599" cy="292608"/>
+          </a:xfrm>
+          <a:prstGeom prst="rect">
+            <a:avLst/>
+          </a:prstGeom>
+          <a:noFill/>
+        </p:spPr>
+        <p:txBody>
+          <a:bodyPr wrap="square" anchor="t" lIns="27432" rIns="27432" tIns="18288" bIns="18288">
+            <a:spAutoFit/>
+          </a:bodyPr>
+          <a:lstStyle/>
+          <a:p>
+            <a:pPr algn="l"/>
+            <a:r>
+              <a:rPr sz="1200" b="1">
+                <a:solidFill>
+                  <a:srgbClr val="0F172A"/>
+                </a:solidFill>
+                <a:latin typeface="Aptos"/>
+              </a:rPr>
+              <a:t>response ladder: most to least urgent</a:t>
+            </a:r>
+          </a:p>
+        </p:txBody>
+      </p:sp>
+      <p:sp>
+        <p:nvSpPr>
+          <p:cNvPr id="15" name="TextBox 14"/>
+          <p:cNvSpPr txBox="1"/>
+          <p:nvPr/>
+        </p:nvSpPr>
+        <p:spPr>
+          <a:xfrm>
+            <a:off x="6342735" y="1581912"/>
+            <a:ext cx="5254599" cy="704088"/>
+          </a:xfrm>
+          <a:prstGeom prst="rect">
+            <a:avLst/>
+          </a:prstGeom>
+          <a:noFill/>
+        </p:spPr>
+        <p:txBody>
+          <a:bodyPr wrap="square" anchor="t" lIns="27432" rIns="27432" tIns="18288" bIns="18288">
+            <a:spAutoFit/>
+          </a:bodyPr>
+          <a:lstStyle/>
+          <a:p>
+            <a:pPr algn="l"/>
+            <a:r>
+              <a:rPr sz="800" b="0">
+                <a:solidFill>
+                  <a:srgbClr val="475569"/>
+                </a:solidFill>
+                <a:latin typeface="Aptos"/>
+              </a:rPr>
+              <a:t>- mandated report per state law and agency policy
+- notify provider; social work or case management referral
+- caregiver role strain: resources and self-care teaching
+- teaching moment: positive discipline</a:t>
+            </a:r>
+          </a:p>
+        </p:txBody>
+      </p:sp>
+      <p:sp>
+        <p:nvSpPr>
+          <p:cNvPr id="16" name="Rounded Rectangle 15"/>
           <p:cNvSpPr/>
           <p:nvPr/>
         </p:nvSpPr>
@@ -12869,7 +13032,7 @@
       </p:sp>
       <p:sp>
         <p:nvSpPr>
-          <p:cNvPr id="13" name="TextBox 12"/>
+          <p:cNvPr id="17" name="TextBox 16"/>
           <p:cNvSpPr txBox="1"/>
           <p:nvPr/>
         </p:nvSpPr>
@@ -20935,7 +21098,7 @@
                 </a:solidFill>
                 <a:latin typeface="Aptos"/>
               </a:rPr>
-              <a:t>Control of sexuality and reproduction</a:t>
+              <a:t>Sexuality and reproduction</a:t>
             </a:r>
           </a:p>
         </p:txBody>
@@ -21210,7 +21373,7 @@
                 </a:solidFill>
                 <a:latin typeface="Aptos"/>
               </a:rPr>
-              <a:t>Structure matters because it predicts function, cue, and nursing response.</a:t>
+              <a:t>Identify family structure, roles, and the five family functions.</a:t>
             </a:r>
           </a:p>
         </p:txBody>
@@ -21731,7 +21894,7 @@
                 </a:solidFill>
                 <a:latin typeface="Aptos"/>
               </a:rPr>
-              <a:t>Roles seen in dysfunction</a:t>
+              <a:t>Dysfunction roles</a:t>
             </a:r>
           </a:p>
         </p:txBody>
@@ -21766,7 +21929,7 @@
                 </a:solidFill>
                 <a:latin typeface="Aptos"/>
               </a:rPr>
-              <a:t>Hero, mascot, identified patient or scapegoat, invisible or lost child, enabler or caretaker, parentified child.</a:t>
+              <a:t>Hero, mascot, scapegoat, lost child, enabler, parentified child.</a:t>
             </a:r>
           </a:p>
         </p:txBody>
@@ -22166,7 +22329,7 @@
                 </a:solidFill>
                 <a:latin typeface="Aptos"/>
               </a:rPr>
-              <a:t>Structure matters because it predicts function, cue, and nursing response.</a:t>
+              <a:t>Recognize informal and unhealthy family roles and the nurse's obligation to cultural humility.</a:t>
             </a:r>
           </a:p>
         </p:txBody>

--- a/lessons/openrn_hp_ch4/package/20260906_NHP_Family_Dynamics_Part_1.pptx
+++ b/lessons/openrn_hp_ch4/package/20260906_NHP_Family_Dynamics_Part_1.pptx
@@ -883,7 +883,7 @@
           <a:p/>
           <a:p>
             <a:r>
-              <a:t>VISUAL NOTES: Table 4.7 (NANDA diagnoses) not retrievable at build; faculty to insert program's care-planning resource.</a:t>
+              <a:t>VISUAL NOTES: Table 4.7 (NANDA diagnoses) not retrievable at build; reviewer to insert the program's care-planning resource.</a:t>
             </a:r>
           </a:p>
         </p:txBody>
@@ -1739,7 +1739,7 @@
           <a:p/>
           <a:p>
             <a:r>
-              <a:t>VISUAL NOTES: Table 4.2 (modern family structures) not retrievable at build; faculty may add examples.</a:t>
+              <a:t>VISUAL NOTES: Table 4.2 (modern family structures) not retrievable at build; the reviewer may add examples.</a:t>
             </a:r>
           </a:p>
         </p:txBody>
